--- a/ppt/算法讲解150【扩展】有序表专题3-替罪羊树.pptx
+++ b/ppt/算法讲解150【扩展】有序表专题3-替罪羊树.pptx
@@ -11,6 +11,11 @@
     <p:sldId id="256" r:id="rId8"/>
     <p:sldId id="257" r:id="rId9"/>
     <p:sldId id="258" r:id="rId10"/>
+    <p:sldId id="259" r:id="rId11"/>
+    <p:sldId id="260" r:id="rId12"/>
+    <p:sldId id="261" r:id="rId13"/>
+    <p:sldId id="262" r:id="rId14"/>
+    <p:sldId id="263" r:id="rId15"/>
   </p:sldIdLst>
   <p:sldSz cx="24384000" cy="13716000"/>
   <p:notesSz cx="6858000" cy="9144000"/>
@@ -4921,6 +4926,1460 @@
 </p:sld>
 </file>
 
+<file path=ppt/slides/slide4.xml><?xml version="1.0" encoding="utf-8"?>
+<p:sld xmlns:a="http://schemas.openxmlformats.org/drawingml/2006/main" xmlns:r="http://schemas.openxmlformats.org/officeDocument/2006/relationships" xmlns:p="http://schemas.openxmlformats.org/presentationml/2006/main" xmlns:m="http://schemas.openxmlformats.org/officeDocument/2006/math" xmlns:a14="http://schemas.microsoft.com/office/drawing/2010/main" showMasterSp="1" showMasterPhAnim="1">
+  <p:cSld>
+    <p:spTree>
+      <p:nvGrpSpPr>
+        <p:cNvPr id="1" name=""/>
+        <p:cNvGrpSpPr/>
+        <p:nvPr/>
+      </p:nvGrpSpPr>
+      <p:grpSpPr>
+        <a:xfrm>
+          <a:off x="0" y="0"/>
+          <a:ext cx="0" cy="0"/>
+          <a:chOff x="0" y="0"/>
+          <a:chExt cx="0" cy="0"/>
+        </a:xfrm>
+      </p:grpSpPr>
+      <p:sp>
+        <p:nvSpPr>
+          <p:cNvPr id="163" name="替罪羊树"/>
+          <p:cNvSpPr txBox="1"/>
+          <p:nvPr>
+            <p:ph type="ctrTitle"/>
+          </p:nvPr>
+        </p:nvSpPr>
+        <p:spPr>
+          <a:xfrm>
+            <a:off x="1206498" y="464303"/>
+            <a:ext cx="21971004" cy="2021991"/>
+          </a:xfrm>
+          <a:prstGeom prst="rect">
+            <a:avLst/>
+          </a:prstGeom>
+        </p:spPr>
+        <p:txBody>
+          <a:bodyPr/>
+          <a:lstStyle>
+            <a:lvl1pPr defTabSz="825500">
+              <a:lnSpc>
+                <a:spcPct val="100000"/>
+              </a:lnSpc>
+              <a:defRPr b="0" spc="0" sz="5500">
+                <a:latin typeface="Monaco"/>
+                <a:ea typeface="Monaco"/>
+                <a:cs typeface="Monaco"/>
+                <a:sym typeface="Monaco"/>
+              </a:defRPr>
+            </a:lvl1pPr>
+          </a:lstStyle>
+          <a:p>
+            <a:pPr/>
+            <a:r>
+              <a:t>替罪羊树</a:t>
+            </a:r>
+          </a:p>
+        </p:txBody>
+      </p:sp>
+      <p:sp>
+        <p:nvSpPr>
+          <p:cNvPr id="164" name="左程云"/>
+          <p:cNvSpPr txBox="1"/>
+          <p:nvPr/>
+        </p:nvSpPr>
+        <p:spPr>
+          <a:xfrm>
+            <a:off x="1206500" y="12631366"/>
+            <a:ext cx="21971001" cy="736601"/>
+          </a:xfrm>
+          <a:prstGeom prst="rect">
+            <a:avLst/>
+          </a:prstGeom>
+          <a:ln w="12700">
+            <a:miter lim="400000"/>
+          </a:ln>
+          <a:extLst>
+            <a:ext uri="{C572A759-6A51-4108-AA02-DFA0A04FC94B}">
+              <ma14:wrappingTextBoxFlag xmlns:ma14="http://schemas.microsoft.com/office/mac/drawingml/2011/main" val="1"/>
+            </a:ext>
+          </a:extLst>
+        </p:spPr>
+        <p:txBody>
+          <a:bodyPr lIns="50800" tIns="50800" rIns="50800" bIns="50800" anchor="ctr">
+            <a:spAutoFit/>
+          </a:bodyPr>
+          <a:lstStyle>
+            <a:lvl1pPr algn="r" defTabSz="825500">
+              <a:defRPr sz="3600">
+                <a:solidFill>
+                  <a:srgbClr val="000000"/>
+                </a:solidFill>
+                <a:latin typeface="Monaco"/>
+                <a:ea typeface="Monaco"/>
+                <a:cs typeface="Monaco"/>
+                <a:sym typeface="Monaco"/>
+              </a:defRPr>
+            </a:lvl1pPr>
+          </a:lstStyle>
+          <a:p>
+            <a:pPr/>
+            <a:r>
+              <a:t>左程云</a:t>
+            </a:r>
+          </a:p>
+        </p:txBody>
+      </p:sp>
+      <p:sp>
+        <p:nvSpPr>
+          <p:cNvPr id="165" name="重要更新！重要补充！…"/>
+          <p:cNvSpPr txBox="1"/>
+          <p:nvPr/>
+        </p:nvSpPr>
+        <p:spPr>
+          <a:xfrm>
+            <a:off x="1206499" y="2978820"/>
+            <a:ext cx="21971002" cy="9365108"/>
+          </a:xfrm>
+          <a:prstGeom prst="rect">
+            <a:avLst/>
+          </a:prstGeom>
+          <a:ln w="12700">
+            <a:miter lim="400000"/>
+          </a:ln>
+          <a:extLst>
+            <a:ext uri="{C572A759-6A51-4108-AA02-DFA0A04FC94B}">
+              <ma14:wrappingTextBoxFlag xmlns:ma14="http://schemas.microsoft.com/office/mac/drawingml/2011/main" val="1"/>
+            </a:ext>
+          </a:extLst>
+        </p:spPr>
+        <p:txBody>
+          <a:bodyPr lIns="45719" rIns="45719">
+            <a:normAutofit fontScale="100000" lnSpcReduction="0"/>
+          </a:bodyPr>
+          <a:lstStyle/>
+          <a:p>
+            <a:pPr algn="l" defTabSz="825500">
+              <a:defRPr sz="3600">
+                <a:solidFill>
+                  <a:srgbClr val="000000"/>
+                </a:solidFill>
+                <a:latin typeface="Monaco"/>
+                <a:ea typeface="Monaco"/>
+                <a:cs typeface="Monaco"/>
+                <a:sym typeface="Monaco"/>
+              </a:defRPr>
+            </a:pPr>
+            <a:r>
+              <a:t>重要更新！重要补充！</a:t>
+            </a:r>
+          </a:p>
+          <a:p>
+            <a:pPr algn="l" defTabSz="825500">
+              <a:defRPr sz="3600">
+                <a:solidFill>
+                  <a:srgbClr val="000000"/>
+                </a:solidFill>
+                <a:latin typeface="Monaco"/>
+                <a:ea typeface="Monaco"/>
+                <a:cs typeface="Monaco"/>
+                <a:sym typeface="Monaco"/>
+              </a:defRPr>
+            </a:pPr>
+          </a:p>
+          <a:p>
+            <a:pPr algn="l" defTabSz="825500">
+              <a:defRPr sz="3600">
+                <a:solidFill>
+                  <a:srgbClr val="000000"/>
+                </a:solidFill>
+                <a:latin typeface="Monaco"/>
+                <a:ea typeface="Monaco"/>
+                <a:cs typeface="Monaco"/>
+                <a:sym typeface="Monaco"/>
+              </a:defRPr>
+            </a:pPr>
+            <a:r>
+              <a:t>之前讲的内容并没有讲错！</a:t>
+            </a:r>
+          </a:p>
+          <a:p>
+            <a:pPr algn="l" defTabSz="825500">
+              <a:defRPr sz="3600">
+                <a:solidFill>
+                  <a:srgbClr val="000000"/>
+                </a:solidFill>
+                <a:latin typeface="Monaco"/>
+                <a:ea typeface="Monaco"/>
+                <a:cs typeface="Monaco"/>
+                <a:sym typeface="Monaco"/>
+              </a:defRPr>
+            </a:pPr>
+          </a:p>
+          <a:p>
+            <a:pPr algn="l" defTabSz="825500">
+              <a:defRPr sz="3600">
+                <a:solidFill>
+                  <a:srgbClr val="000000"/>
+                </a:solidFill>
+                <a:latin typeface="Monaco"/>
+                <a:ea typeface="Monaco"/>
+                <a:cs typeface="Monaco"/>
+                <a:sym typeface="Monaco"/>
+              </a:defRPr>
+            </a:pPr>
+            <a:r>
+              <a:t>补充的讲解，是对我实现的替罪羊树，做进一步的分析和说明</a:t>
+            </a:r>
+          </a:p>
+          <a:p>
+            <a:pPr algn="l" defTabSz="825500">
+              <a:defRPr sz="3600">
+                <a:solidFill>
+                  <a:srgbClr val="000000"/>
+                </a:solidFill>
+                <a:latin typeface="Monaco"/>
+                <a:ea typeface="Monaco"/>
+                <a:cs typeface="Monaco"/>
+                <a:sym typeface="Monaco"/>
+              </a:defRPr>
+            </a:pPr>
+          </a:p>
+          <a:p>
+            <a:pPr algn="l" defTabSz="825500">
+              <a:defRPr sz="3600">
+                <a:solidFill>
+                  <a:srgbClr val="000000"/>
+                </a:solidFill>
+                <a:latin typeface="Monaco"/>
+                <a:ea typeface="Monaco"/>
+                <a:cs typeface="Monaco"/>
+                <a:sym typeface="Monaco"/>
+              </a:defRPr>
+            </a:pPr>
+            <a:r>
+              <a:t>我实现的替罪羊树 vs 经典替罪羊树</a:t>
+            </a:r>
+          </a:p>
+          <a:p>
+            <a:pPr algn="l" defTabSz="825500">
+              <a:defRPr sz="3600">
+                <a:solidFill>
+                  <a:srgbClr val="000000"/>
+                </a:solidFill>
+                <a:latin typeface="Monaco"/>
+                <a:ea typeface="Monaco"/>
+                <a:cs typeface="Monaco"/>
+                <a:sym typeface="Monaco"/>
+              </a:defRPr>
+            </a:pPr>
+          </a:p>
+          <a:p>
+            <a:pPr algn="l" defTabSz="825500">
+              <a:defRPr sz="3600">
+                <a:solidFill>
+                  <a:srgbClr val="000000"/>
+                </a:solidFill>
+                <a:latin typeface="Monaco"/>
+                <a:ea typeface="Monaco"/>
+                <a:cs typeface="Monaco"/>
+                <a:sym typeface="Monaco"/>
+              </a:defRPr>
+            </a:pPr>
+            <a:r>
+              <a:t>同时补充了，不做词频压缩的替罪羊树的实现</a:t>
+            </a:r>
+          </a:p>
+        </p:txBody>
+      </p:sp>
+    </p:spTree>
+  </p:cSld>
+  <p:clrMapOvr>
+    <a:masterClrMapping/>
+  </p:clrMapOvr>
+  <p:transition xmlns:p14="http://schemas.microsoft.com/office/powerpoint/2010/main" spd="med" advClick="1"/>
+</p:sld>
+</file>
+
+<file path=ppt/slides/slide5.xml><?xml version="1.0" encoding="utf-8"?>
+<p:sld xmlns:a="http://schemas.openxmlformats.org/drawingml/2006/main" xmlns:r="http://schemas.openxmlformats.org/officeDocument/2006/relationships" xmlns:p="http://schemas.openxmlformats.org/presentationml/2006/main" xmlns:m="http://schemas.openxmlformats.org/officeDocument/2006/math" xmlns:a14="http://schemas.microsoft.com/office/drawing/2010/main" showMasterSp="1" showMasterPhAnim="1">
+  <p:cSld>
+    <p:spTree>
+      <p:nvGrpSpPr>
+        <p:cNvPr id="1" name=""/>
+        <p:cNvGrpSpPr/>
+        <p:nvPr/>
+      </p:nvGrpSpPr>
+      <p:grpSpPr>
+        <a:xfrm>
+          <a:off x="0" y="0"/>
+          <a:ext cx="0" cy="0"/>
+          <a:chOff x="0" y="0"/>
+          <a:chExt cx="0" cy="0"/>
+        </a:xfrm>
+      </p:grpSpPr>
+      <p:sp>
+        <p:nvSpPr>
+          <p:cNvPr id="167" name="替罪羊树"/>
+          <p:cNvSpPr txBox="1"/>
+          <p:nvPr>
+            <p:ph type="ctrTitle"/>
+          </p:nvPr>
+        </p:nvSpPr>
+        <p:spPr>
+          <a:xfrm>
+            <a:off x="1206498" y="464303"/>
+            <a:ext cx="21971004" cy="2021991"/>
+          </a:xfrm>
+          <a:prstGeom prst="rect">
+            <a:avLst/>
+          </a:prstGeom>
+        </p:spPr>
+        <p:txBody>
+          <a:bodyPr/>
+          <a:lstStyle>
+            <a:lvl1pPr defTabSz="825500">
+              <a:lnSpc>
+                <a:spcPct val="100000"/>
+              </a:lnSpc>
+              <a:defRPr b="0" spc="0" sz="5500">
+                <a:latin typeface="Monaco"/>
+                <a:ea typeface="Monaco"/>
+                <a:cs typeface="Monaco"/>
+                <a:sym typeface="Monaco"/>
+              </a:defRPr>
+            </a:lvl1pPr>
+          </a:lstStyle>
+          <a:p>
+            <a:pPr/>
+            <a:r>
+              <a:t>替罪羊树</a:t>
+            </a:r>
+          </a:p>
+        </p:txBody>
+      </p:sp>
+      <p:sp>
+        <p:nvSpPr>
+          <p:cNvPr id="168" name="左程云"/>
+          <p:cNvSpPr txBox="1"/>
+          <p:nvPr/>
+        </p:nvSpPr>
+        <p:spPr>
+          <a:xfrm>
+            <a:off x="1206500" y="12631366"/>
+            <a:ext cx="21971001" cy="736601"/>
+          </a:xfrm>
+          <a:prstGeom prst="rect">
+            <a:avLst/>
+          </a:prstGeom>
+          <a:ln w="12700">
+            <a:miter lim="400000"/>
+          </a:ln>
+          <a:extLst>
+            <a:ext uri="{C572A759-6A51-4108-AA02-DFA0A04FC94B}">
+              <ma14:wrappingTextBoxFlag xmlns:ma14="http://schemas.microsoft.com/office/mac/drawingml/2011/main" val="1"/>
+            </a:ext>
+          </a:extLst>
+        </p:spPr>
+        <p:txBody>
+          <a:bodyPr lIns="50800" tIns="50800" rIns="50800" bIns="50800" anchor="ctr">
+            <a:spAutoFit/>
+          </a:bodyPr>
+          <a:lstStyle>
+            <a:lvl1pPr algn="r" defTabSz="825500">
+              <a:defRPr sz="3600">
+                <a:solidFill>
+                  <a:srgbClr val="000000"/>
+                </a:solidFill>
+                <a:latin typeface="Monaco"/>
+                <a:ea typeface="Monaco"/>
+                <a:cs typeface="Monaco"/>
+                <a:sym typeface="Monaco"/>
+              </a:defRPr>
+            </a:lvl1pPr>
+          </a:lstStyle>
+          <a:p>
+            <a:pPr/>
+            <a:r>
+              <a:t>左程云</a:t>
+            </a:r>
+          </a:p>
+        </p:txBody>
+      </p:sp>
+      <p:sp>
+        <p:nvSpPr>
+          <p:cNvPr id="169" name="经典替罪羊树的设计…"/>
+          <p:cNvSpPr txBox="1"/>
+          <p:nvPr/>
+        </p:nvSpPr>
+        <p:spPr>
+          <a:xfrm>
+            <a:off x="1206499" y="2978820"/>
+            <a:ext cx="21971002" cy="9365108"/>
+          </a:xfrm>
+          <a:prstGeom prst="rect">
+            <a:avLst/>
+          </a:prstGeom>
+          <a:ln w="12700">
+            <a:miter lim="400000"/>
+          </a:ln>
+          <a:extLst>
+            <a:ext uri="{C572A759-6A51-4108-AA02-DFA0A04FC94B}">
+              <ma14:wrappingTextBoxFlag xmlns:ma14="http://schemas.microsoft.com/office/mac/drawingml/2011/main" val="1"/>
+            </a:ext>
+          </a:extLst>
+        </p:spPr>
+        <p:txBody>
+          <a:bodyPr lIns="45719" rIns="45719">
+            <a:normAutofit fontScale="100000" lnSpcReduction="0"/>
+          </a:bodyPr>
+          <a:lstStyle/>
+          <a:p>
+            <a:pPr algn="l" defTabSz="825500">
+              <a:defRPr sz="3600">
+                <a:solidFill>
+                  <a:srgbClr val="000000"/>
+                </a:solidFill>
+                <a:latin typeface="Monaco"/>
+                <a:ea typeface="Monaco"/>
+                <a:cs typeface="Monaco"/>
+                <a:sym typeface="Monaco"/>
+              </a:defRPr>
+            </a:pPr>
+            <a:r>
+              <a:t>经典替罪羊树的设计</a:t>
+            </a:r>
+          </a:p>
+          <a:p>
+            <a:pPr algn="l" defTabSz="825500">
+              <a:defRPr sz="3600">
+                <a:solidFill>
+                  <a:srgbClr val="000000"/>
+                </a:solidFill>
+                <a:latin typeface="Monaco"/>
+                <a:ea typeface="Monaco"/>
+                <a:cs typeface="Monaco"/>
+                <a:sym typeface="Monaco"/>
+              </a:defRPr>
+            </a:pPr>
+            <a:r>
+              <a:t>1，allSiz代表总节点数，aliveSiz代表存活节点数</a:t>
+            </a:r>
+          </a:p>
+          <a:p>
+            <a:pPr algn="l" defTabSz="825500">
+              <a:defRPr sz="3600">
+                <a:solidFill>
+                  <a:srgbClr val="000000"/>
+                </a:solidFill>
+                <a:latin typeface="Monaco"/>
+                <a:ea typeface="Monaco"/>
+                <a:cs typeface="Monaco"/>
+                <a:sym typeface="Monaco"/>
+              </a:defRPr>
+            </a:pPr>
+            <a:r>
+              <a:t>2，某节点的左子树或右子树大小高于平衡因子，触发重构</a:t>
+            </a:r>
+          </a:p>
+          <a:p>
+            <a:pPr algn="l" defTabSz="825500">
+              <a:defRPr sz="3600">
+                <a:solidFill>
+                  <a:srgbClr val="000000"/>
+                </a:solidFill>
+                <a:latin typeface="Monaco"/>
+                <a:ea typeface="Monaco"/>
+                <a:cs typeface="Monaco"/>
+                <a:sym typeface="Monaco"/>
+              </a:defRPr>
+            </a:pPr>
+            <a:r>
+              <a:t>3，某节点的子树中，存活节点的比例低于设定阈值，触发重构</a:t>
+            </a:r>
+          </a:p>
+          <a:p>
+            <a:pPr algn="l" defTabSz="825500">
+              <a:defRPr sz="3600">
+                <a:solidFill>
+                  <a:srgbClr val="000000"/>
+                </a:solidFill>
+                <a:latin typeface="Monaco"/>
+                <a:ea typeface="Monaco"/>
+                <a:cs typeface="Monaco"/>
+                <a:sym typeface="Monaco"/>
+              </a:defRPr>
+            </a:pPr>
+            <a:r>
+              <a:t>4，重构时，去掉不平衡子树的所有死亡节点，留下存活节点</a:t>
+            </a:r>
+          </a:p>
+          <a:p>
+            <a:pPr algn="l" defTabSz="825500">
+              <a:defRPr sz="3600">
+                <a:solidFill>
+                  <a:schemeClr val="accent5">
+                    <a:hueOff val="-82419"/>
+                    <a:satOff val="-9513"/>
+                    <a:lumOff val="-16343"/>
+                  </a:schemeClr>
+                </a:solidFill>
+                <a:latin typeface="Monaco"/>
+                <a:ea typeface="Monaco"/>
+                <a:cs typeface="Monaco"/>
+                <a:sym typeface="Monaco"/>
+              </a:defRPr>
+            </a:pPr>
+            <a:r>
+              <a:t>5，节点的allSiz需要维护，所以重构发生后，不平衡子树的上方祖先，需要重新遍历，修正allSiz</a:t>
+            </a:r>
+          </a:p>
+          <a:p>
+            <a:pPr algn="l" defTabSz="825500">
+              <a:defRPr sz="3600">
+                <a:solidFill>
+                  <a:schemeClr val="accent5">
+                    <a:hueOff val="-82419"/>
+                    <a:satOff val="-9513"/>
+                    <a:lumOff val="-16343"/>
+                  </a:schemeClr>
+                </a:solidFill>
+                <a:latin typeface="Monaco"/>
+                <a:ea typeface="Monaco"/>
+                <a:cs typeface="Monaco"/>
+                <a:sym typeface="Monaco"/>
+              </a:defRPr>
+            </a:pPr>
+          </a:p>
+          <a:p>
+            <a:pPr algn="l" defTabSz="825500">
+              <a:defRPr sz="3600">
+                <a:solidFill>
+                  <a:srgbClr val="000000"/>
+                </a:solidFill>
+                <a:latin typeface="Monaco"/>
+                <a:ea typeface="Monaco"/>
+                <a:cs typeface="Monaco"/>
+                <a:sym typeface="Monaco"/>
+              </a:defRPr>
+            </a:pPr>
+            <a:r>
+              <a:t>我的设计</a:t>
+            </a:r>
+          </a:p>
+          <a:p>
+            <a:pPr algn="l" defTabSz="825500">
+              <a:defRPr sz="3600">
+                <a:solidFill>
+                  <a:srgbClr val="000000"/>
+                </a:solidFill>
+                <a:latin typeface="Monaco"/>
+                <a:ea typeface="Monaco"/>
+                <a:cs typeface="Monaco"/>
+                <a:sym typeface="Monaco"/>
+              </a:defRPr>
+            </a:pPr>
+            <a:r>
+              <a:t>1，只维护aliveSiz，不维护allSiz，新增节点时，aliveSiz + 1，删除节点时，aliveSiz - 1</a:t>
+            </a:r>
+          </a:p>
+          <a:p>
+            <a:pPr algn="l" defTabSz="825500">
+              <a:defRPr sz="3600">
+                <a:solidFill>
+                  <a:srgbClr val="000000"/>
+                </a:solidFill>
+                <a:latin typeface="Monaco"/>
+                <a:ea typeface="Monaco"/>
+                <a:cs typeface="Monaco"/>
+                <a:sym typeface="Monaco"/>
+              </a:defRPr>
+            </a:pPr>
+            <a:r>
+              <a:t>2，某节点的左子树或右子树，只关注存活节点数，一旦高于平衡因子，触发重构</a:t>
+            </a:r>
+          </a:p>
+          <a:p>
+            <a:pPr algn="l" defTabSz="825500">
+              <a:defRPr sz="3600">
+                <a:solidFill>
+                  <a:srgbClr val="000000"/>
+                </a:solidFill>
+                <a:latin typeface="Monaco"/>
+                <a:ea typeface="Monaco"/>
+                <a:cs typeface="Monaco"/>
+                <a:sym typeface="Monaco"/>
+              </a:defRPr>
+            </a:pPr>
+            <a:r>
+              <a:t>3，新增和删除之后，都可能触发重构，重构时，去掉不平衡子树的所有死亡节点，留下存活节点</a:t>
+            </a:r>
+          </a:p>
+          <a:p>
+            <a:pPr algn="l" defTabSz="825500">
+              <a:defRPr sz="3600">
+                <a:solidFill>
+                  <a:schemeClr val="accent5">
+                    <a:hueOff val="-82419"/>
+                    <a:satOff val="-9513"/>
+                    <a:lumOff val="-16343"/>
+                  </a:schemeClr>
+                </a:solidFill>
+                <a:latin typeface="Monaco"/>
+                <a:ea typeface="Monaco"/>
+                <a:cs typeface="Monaco"/>
+                <a:sym typeface="Monaco"/>
+              </a:defRPr>
+            </a:pPr>
+            <a:r>
+              <a:t>4，新增和删除时，节点的aliveSiz可以正确更新，重构发生后，不用再次遍历上方祖先</a:t>
+            </a:r>
+          </a:p>
+          <a:p>
+            <a:pPr algn="l" defTabSz="825500">
+              <a:defRPr sz="3600">
+                <a:solidFill>
+                  <a:srgbClr val="000000"/>
+                </a:solidFill>
+                <a:latin typeface="Monaco"/>
+                <a:ea typeface="Monaco"/>
+                <a:cs typeface="Monaco"/>
+                <a:sym typeface="Monaco"/>
+              </a:defRPr>
+            </a:pPr>
+            <a:r>
+              <a:t>5，重要剪枝：某棵子树的存活节点数是0，查询时直接无视，新增时该子树直接被新增节点替换</a:t>
+            </a:r>
+          </a:p>
+        </p:txBody>
+      </p:sp>
+    </p:spTree>
+  </p:cSld>
+  <p:clrMapOvr>
+    <a:masterClrMapping/>
+  </p:clrMapOvr>
+  <p:transition xmlns:p14="http://schemas.microsoft.com/office/powerpoint/2010/main" spd="med" advClick="1"/>
+</p:sld>
+</file>
+
+<file path=ppt/slides/slide6.xml><?xml version="1.0" encoding="utf-8"?>
+<p:sld xmlns:a="http://schemas.openxmlformats.org/drawingml/2006/main" xmlns:r="http://schemas.openxmlformats.org/officeDocument/2006/relationships" xmlns:p="http://schemas.openxmlformats.org/presentationml/2006/main" xmlns:m="http://schemas.openxmlformats.org/officeDocument/2006/math" xmlns:a14="http://schemas.microsoft.com/office/drawing/2010/main" showMasterSp="1" showMasterPhAnim="1">
+  <p:cSld>
+    <p:spTree>
+      <p:nvGrpSpPr>
+        <p:cNvPr id="1" name=""/>
+        <p:cNvGrpSpPr/>
+        <p:nvPr/>
+      </p:nvGrpSpPr>
+      <p:grpSpPr>
+        <a:xfrm>
+          <a:off x="0" y="0"/>
+          <a:ext cx="0" cy="0"/>
+          <a:chOff x="0" y="0"/>
+          <a:chExt cx="0" cy="0"/>
+        </a:xfrm>
+      </p:grpSpPr>
+      <p:sp>
+        <p:nvSpPr>
+          <p:cNvPr id="171" name="替罪羊树"/>
+          <p:cNvSpPr txBox="1"/>
+          <p:nvPr>
+            <p:ph type="ctrTitle"/>
+          </p:nvPr>
+        </p:nvSpPr>
+        <p:spPr>
+          <a:xfrm>
+            <a:off x="1206498" y="464303"/>
+            <a:ext cx="21971004" cy="2021991"/>
+          </a:xfrm>
+          <a:prstGeom prst="rect">
+            <a:avLst/>
+          </a:prstGeom>
+        </p:spPr>
+        <p:txBody>
+          <a:bodyPr/>
+          <a:lstStyle>
+            <a:lvl1pPr defTabSz="825500">
+              <a:lnSpc>
+                <a:spcPct val="100000"/>
+              </a:lnSpc>
+              <a:defRPr b="0" spc="0" sz="5500">
+                <a:latin typeface="Monaco"/>
+                <a:ea typeface="Monaco"/>
+                <a:cs typeface="Monaco"/>
+                <a:sym typeface="Monaco"/>
+              </a:defRPr>
+            </a:lvl1pPr>
+          </a:lstStyle>
+          <a:p>
+            <a:pPr/>
+            <a:r>
+              <a:t>替罪羊树</a:t>
+            </a:r>
+          </a:p>
+        </p:txBody>
+      </p:sp>
+      <p:sp>
+        <p:nvSpPr>
+          <p:cNvPr id="172" name="左程云"/>
+          <p:cNvSpPr txBox="1"/>
+          <p:nvPr/>
+        </p:nvSpPr>
+        <p:spPr>
+          <a:xfrm>
+            <a:off x="1206500" y="12631366"/>
+            <a:ext cx="21971001" cy="736601"/>
+          </a:xfrm>
+          <a:prstGeom prst="rect">
+            <a:avLst/>
+          </a:prstGeom>
+          <a:ln w="12700">
+            <a:miter lim="400000"/>
+          </a:ln>
+          <a:extLst>
+            <a:ext uri="{C572A759-6A51-4108-AA02-DFA0A04FC94B}">
+              <ma14:wrappingTextBoxFlag xmlns:ma14="http://schemas.microsoft.com/office/mac/drawingml/2011/main" val="1"/>
+            </a:ext>
+          </a:extLst>
+        </p:spPr>
+        <p:txBody>
+          <a:bodyPr lIns="50800" tIns="50800" rIns="50800" bIns="50800" anchor="ctr">
+            <a:spAutoFit/>
+          </a:bodyPr>
+          <a:lstStyle>
+            <a:lvl1pPr algn="r" defTabSz="825500">
+              <a:defRPr sz="3600">
+                <a:solidFill>
+                  <a:srgbClr val="000000"/>
+                </a:solidFill>
+                <a:latin typeface="Monaco"/>
+                <a:ea typeface="Monaco"/>
+                <a:cs typeface="Monaco"/>
+                <a:sym typeface="Monaco"/>
+              </a:defRPr>
+            </a:lvl1pPr>
+          </a:lstStyle>
+          <a:p>
+            <a:pPr/>
+            <a:r>
+              <a:t>左程云</a:t>
+            </a:r>
+          </a:p>
+        </p:txBody>
+      </p:sp>
+      <p:sp>
+        <p:nvSpPr>
+          <p:cNvPr id="173" name="会不会残留大量死亡节点，导致重构很慢？…"/>
+          <p:cNvSpPr txBox="1"/>
+          <p:nvPr/>
+        </p:nvSpPr>
+        <p:spPr>
+          <a:xfrm>
+            <a:off x="1206499" y="2978820"/>
+            <a:ext cx="21971002" cy="9365108"/>
+          </a:xfrm>
+          <a:prstGeom prst="rect">
+            <a:avLst/>
+          </a:prstGeom>
+          <a:ln w="12700">
+            <a:miter lim="400000"/>
+          </a:ln>
+          <a:extLst>
+            <a:ext uri="{C572A759-6A51-4108-AA02-DFA0A04FC94B}">
+              <ma14:wrappingTextBoxFlag xmlns:ma14="http://schemas.microsoft.com/office/mac/drawingml/2011/main" val="1"/>
+            </a:ext>
+          </a:extLst>
+        </p:spPr>
+        <p:txBody>
+          <a:bodyPr lIns="45719" rIns="45719">
+            <a:normAutofit fontScale="100000" lnSpcReduction="0"/>
+          </a:bodyPr>
+          <a:lstStyle/>
+          <a:p>
+            <a:pPr algn="l" defTabSz="825500">
+              <a:defRPr sz="3600">
+                <a:solidFill>
+                  <a:srgbClr val="000000"/>
+                </a:solidFill>
+                <a:latin typeface="Monaco"/>
+                <a:ea typeface="Monaco"/>
+                <a:cs typeface="Monaco"/>
+                <a:sym typeface="Monaco"/>
+              </a:defRPr>
+            </a:pPr>
+            <a:r>
+              <a:t>会不会残留大量死亡节点，导致重构很慢？</a:t>
+            </a:r>
+          </a:p>
+          <a:p>
+            <a:pPr algn="l" defTabSz="825500">
+              <a:defRPr sz="3600">
+                <a:solidFill>
+                  <a:srgbClr val="000000"/>
+                </a:solidFill>
+                <a:latin typeface="Monaco"/>
+                <a:ea typeface="Monaco"/>
+                <a:cs typeface="Monaco"/>
+                <a:sym typeface="Monaco"/>
+              </a:defRPr>
+            </a:pPr>
+          </a:p>
+          <a:p>
+            <a:pPr algn="l" defTabSz="825500">
+              <a:defRPr sz="3600">
+                <a:solidFill>
+                  <a:srgbClr val="000000"/>
+                </a:solidFill>
+                <a:latin typeface="Monaco"/>
+                <a:ea typeface="Monaco"/>
+                <a:cs typeface="Monaco"/>
+                <a:sym typeface="Monaco"/>
+              </a:defRPr>
+            </a:pPr>
+            <a:r>
+              <a:t>死亡节点会不会连成一条长链，导致查询很慢？</a:t>
+            </a:r>
+          </a:p>
+          <a:p>
+            <a:pPr algn="l" defTabSz="825500">
+              <a:defRPr sz="3600">
+                <a:solidFill>
+                  <a:srgbClr val="000000"/>
+                </a:solidFill>
+                <a:latin typeface="Monaco"/>
+                <a:ea typeface="Monaco"/>
+                <a:cs typeface="Monaco"/>
+                <a:sym typeface="Monaco"/>
+              </a:defRPr>
+            </a:pPr>
+          </a:p>
+          <a:p>
+            <a:pPr algn="l" defTabSz="825500">
+              <a:defRPr sz="3600">
+                <a:solidFill>
+                  <a:srgbClr val="000000"/>
+                </a:solidFill>
+                <a:latin typeface="Monaco"/>
+                <a:ea typeface="Monaco"/>
+                <a:cs typeface="Monaco"/>
+                <a:sym typeface="Monaco"/>
+              </a:defRPr>
+            </a:pPr>
+            <a:r>
+              <a:t>复杂度是如何得到保证的？</a:t>
+            </a:r>
+          </a:p>
+        </p:txBody>
+      </p:sp>
+    </p:spTree>
+  </p:cSld>
+  <p:clrMapOvr>
+    <a:masterClrMapping/>
+  </p:clrMapOvr>
+  <p:transition xmlns:p14="http://schemas.microsoft.com/office/powerpoint/2010/main" spd="med" advClick="1"/>
+</p:sld>
+</file>
+
+<file path=ppt/slides/slide7.xml><?xml version="1.0" encoding="utf-8"?>
+<p:sld xmlns:a="http://schemas.openxmlformats.org/drawingml/2006/main" xmlns:r="http://schemas.openxmlformats.org/officeDocument/2006/relationships" xmlns:p="http://schemas.openxmlformats.org/presentationml/2006/main" xmlns:m="http://schemas.openxmlformats.org/officeDocument/2006/math" xmlns:a14="http://schemas.microsoft.com/office/drawing/2010/main" showMasterSp="1" showMasterPhAnim="1">
+  <p:cSld>
+    <p:spTree>
+      <p:nvGrpSpPr>
+        <p:cNvPr id="1" name=""/>
+        <p:cNvGrpSpPr/>
+        <p:nvPr/>
+      </p:nvGrpSpPr>
+      <p:grpSpPr>
+        <a:xfrm>
+          <a:off x="0" y="0"/>
+          <a:ext cx="0" cy="0"/>
+          <a:chOff x="0" y="0"/>
+          <a:chExt cx="0" cy="0"/>
+        </a:xfrm>
+      </p:grpSpPr>
+      <p:sp>
+        <p:nvSpPr>
+          <p:cNvPr id="175" name="替罪羊树"/>
+          <p:cNvSpPr txBox="1"/>
+          <p:nvPr>
+            <p:ph type="ctrTitle"/>
+          </p:nvPr>
+        </p:nvSpPr>
+        <p:spPr>
+          <a:xfrm>
+            <a:off x="1206498" y="464303"/>
+            <a:ext cx="21971004" cy="2021991"/>
+          </a:xfrm>
+          <a:prstGeom prst="rect">
+            <a:avLst/>
+          </a:prstGeom>
+        </p:spPr>
+        <p:txBody>
+          <a:bodyPr/>
+          <a:lstStyle>
+            <a:lvl1pPr defTabSz="825500">
+              <a:lnSpc>
+                <a:spcPct val="100000"/>
+              </a:lnSpc>
+              <a:defRPr b="0" spc="0" sz="5500">
+                <a:latin typeface="Monaco"/>
+                <a:ea typeface="Monaco"/>
+                <a:cs typeface="Monaco"/>
+                <a:sym typeface="Monaco"/>
+              </a:defRPr>
+            </a:lvl1pPr>
+          </a:lstStyle>
+          <a:p>
+            <a:pPr/>
+            <a:r>
+              <a:t>替罪羊树</a:t>
+            </a:r>
+          </a:p>
+        </p:txBody>
+      </p:sp>
+      <p:sp>
+        <p:nvSpPr>
+          <p:cNvPr id="176" name="左程云"/>
+          <p:cNvSpPr txBox="1"/>
+          <p:nvPr/>
+        </p:nvSpPr>
+        <p:spPr>
+          <a:xfrm>
+            <a:off x="1206500" y="12631366"/>
+            <a:ext cx="21971001" cy="736601"/>
+          </a:xfrm>
+          <a:prstGeom prst="rect">
+            <a:avLst/>
+          </a:prstGeom>
+          <a:ln w="12700">
+            <a:miter lim="400000"/>
+          </a:ln>
+          <a:extLst>
+            <a:ext uri="{C572A759-6A51-4108-AA02-DFA0A04FC94B}">
+              <ma14:wrappingTextBoxFlag xmlns:ma14="http://schemas.microsoft.com/office/mac/drawingml/2011/main" val="1"/>
+            </a:ext>
+          </a:extLst>
+        </p:spPr>
+        <p:txBody>
+          <a:bodyPr lIns="50800" tIns="50800" rIns="50800" bIns="50800" anchor="ctr">
+            <a:spAutoFit/>
+          </a:bodyPr>
+          <a:lstStyle>
+            <a:lvl1pPr algn="r" defTabSz="825500">
+              <a:defRPr sz="3600">
+                <a:solidFill>
+                  <a:srgbClr val="000000"/>
+                </a:solidFill>
+                <a:latin typeface="Monaco"/>
+                <a:ea typeface="Monaco"/>
+                <a:cs typeface="Monaco"/>
+                <a:sym typeface="Monaco"/>
+              </a:defRPr>
+            </a:lvl1pPr>
+          </a:lstStyle>
+          <a:p>
+            <a:pPr/>
+            <a:r>
+              <a:t>左程云</a:t>
+            </a:r>
+          </a:p>
+        </p:txBody>
+      </p:sp>
+      <p:sp>
+        <p:nvSpPr>
+          <p:cNvPr id="177" name="有关复杂度的说明…"/>
+          <p:cNvSpPr txBox="1"/>
+          <p:nvPr/>
+        </p:nvSpPr>
+        <p:spPr>
+          <a:xfrm>
+            <a:off x="1206499" y="2978820"/>
+            <a:ext cx="21971002" cy="9365108"/>
+          </a:xfrm>
+          <a:prstGeom prst="rect">
+            <a:avLst/>
+          </a:prstGeom>
+          <a:ln w="12700">
+            <a:miter lim="400000"/>
+          </a:ln>
+          <a:extLst>
+            <a:ext uri="{C572A759-6A51-4108-AA02-DFA0A04FC94B}">
+              <ma14:wrappingTextBoxFlag xmlns:ma14="http://schemas.microsoft.com/office/mac/drawingml/2011/main" val="1"/>
+            </a:ext>
+          </a:extLst>
+        </p:spPr>
+        <p:txBody>
+          <a:bodyPr lIns="45719" rIns="45719">
+            <a:normAutofit fontScale="100000" lnSpcReduction="0"/>
+          </a:bodyPr>
+          <a:lstStyle/>
+          <a:p>
+            <a:pPr algn="l" defTabSz="825500">
+              <a:defRPr sz="3600">
+                <a:solidFill>
+                  <a:srgbClr val="000000"/>
+                </a:solidFill>
+                <a:latin typeface="Monaco"/>
+                <a:ea typeface="Monaco"/>
+                <a:cs typeface="Monaco"/>
+                <a:sym typeface="Monaco"/>
+              </a:defRPr>
+            </a:pPr>
+            <a:r>
+              <a:t>有关复杂度的说明</a:t>
+            </a:r>
+          </a:p>
+          <a:p>
+            <a:pPr algn="l" defTabSz="825500">
+              <a:defRPr sz="3600">
+                <a:solidFill>
+                  <a:srgbClr val="000000"/>
+                </a:solidFill>
+                <a:latin typeface="Monaco"/>
+                <a:ea typeface="Monaco"/>
+                <a:cs typeface="Monaco"/>
+                <a:sym typeface="Monaco"/>
+              </a:defRPr>
+            </a:pPr>
+            <a:r>
+              <a:t>1，如果某棵子树中已经没有存活节点了，这样的子树完全不用触碰</a:t>
+            </a:r>
+          </a:p>
+          <a:p>
+            <a:pPr algn="l" defTabSz="825500">
+              <a:defRPr sz="3600">
+                <a:solidFill>
+                  <a:srgbClr val="000000"/>
+                </a:solidFill>
+                <a:latin typeface="Monaco"/>
+                <a:ea typeface="Monaco"/>
+                <a:cs typeface="Monaco"/>
+                <a:sym typeface="Monaco"/>
+              </a:defRPr>
+            </a:pPr>
+            <a:r>
+              <a:t>2，我设计的替罪羊树中，不用触碰的子树直接无视，如下分析认为这些子树就是空树</a:t>
+            </a:r>
+          </a:p>
+          <a:p>
+            <a:pPr algn="l" defTabSz="825500">
+              <a:defRPr sz="3600">
+                <a:solidFill>
+                  <a:srgbClr val="000000"/>
+                </a:solidFill>
+                <a:latin typeface="Monaco"/>
+                <a:ea typeface="Monaco"/>
+                <a:cs typeface="Monaco"/>
+                <a:sym typeface="Monaco"/>
+              </a:defRPr>
+            </a:pPr>
+            <a:r>
+              <a:t>3，因为每次新增/删除操作后，所有子树只关注存活节点的数量，并且满足平衡条件</a:t>
+            </a:r>
+          </a:p>
+          <a:p>
+            <a:pPr algn="l" defTabSz="825500">
+              <a:defRPr sz="3600">
+                <a:solidFill>
+                  <a:srgbClr val="000000"/>
+                </a:solidFill>
+                <a:latin typeface="Monaco"/>
+                <a:ea typeface="Monaco"/>
+                <a:cs typeface="Monaco"/>
+                <a:sym typeface="Monaco"/>
+              </a:defRPr>
+            </a:pPr>
+            <a:r>
+              <a:t>4，ALPHA * aliveSiz[i] &gt;= max(aliveSiz[ls[i]], aliveSiz[rs[i]])</a:t>
+            </a:r>
+          </a:p>
+          <a:p>
+            <a:pPr algn="l" defTabSz="825500">
+              <a:defRPr sz="3600">
+                <a:solidFill>
+                  <a:srgbClr val="000000"/>
+                </a:solidFill>
+                <a:latin typeface="Monaco"/>
+                <a:ea typeface="Monaco"/>
+                <a:cs typeface="Monaco"/>
+                <a:sym typeface="Monaco"/>
+              </a:defRPr>
+            </a:pPr>
+            <a:r>
+              <a:t>5，假设树的存活节点数量是k，因为满足平衡条件，一条从上到下的路径中，存活节点数量是O(log k)</a:t>
+            </a:r>
+          </a:p>
+          <a:p>
+            <a:pPr algn="l" defTabSz="825500">
+              <a:defRPr sz="3600">
+                <a:solidFill>
+                  <a:schemeClr val="accent5">
+                    <a:hueOff val="-82419"/>
+                    <a:satOff val="-9513"/>
+                    <a:lumOff val="-16343"/>
+                  </a:schemeClr>
+                </a:solidFill>
+                <a:latin typeface="Monaco"/>
+                <a:ea typeface="Monaco"/>
+                <a:cs typeface="Monaco"/>
+                <a:sym typeface="Monaco"/>
+              </a:defRPr>
+            </a:pPr>
+            <a:r>
+              <a:t>6，死亡节点必须有两个包含存活节点的儿子，否则一定会失衡并触发重构</a:t>
+            </a:r>
+          </a:p>
+          <a:p>
+            <a:pPr algn="l" defTabSz="825500">
+              <a:defRPr sz="3600">
+                <a:solidFill>
+                  <a:schemeClr val="accent5">
+                    <a:hueOff val="-82419"/>
+                    <a:satOff val="-9513"/>
+                    <a:lumOff val="-16343"/>
+                  </a:schemeClr>
+                </a:solidFill>
+                <a:latin typeface="Monaco"/>
+                <a:ea typeface="Monaco"/>
+                <a:cs typeface="Monaco"/>
+                <a:sym typeface="Monaco"/>
+              </a:defRPr>
+            </a:pPr>
+            <a:r>
+              <a:t>7，如果树中有k个存活节点，那么提供连接作用的死亡节点最多有k-1个</a:t>
+            </a:r>
+          </a:p>
+          <a:p>
+            <a:pPr algn="l" defTabSz="825500">
+              <a:defRPr sz="3600">
+                <a:solidFill>
+                  <a:schemeClr val="accent5">
+                    <a:hueOff val="-82419"/>
+                    <a:satOff val="-9513"/>
+                    <a:lumOff val="-16343"/>
+                  </a:schemeClr>
+                </a:solidFill>
+                <a:latin typeface="Monaco"/>
+                <a:ea typeface="Monaco"/>
+                <a:cs typeface="Monaco"/>
+                <a:sym typeface="Monaco"/>
+              </a:defRPr>
+            </a:pPr>
+            <a:r>
+              <a:t>8，死亡节点的连接方式，必然也是近乎平衡的，不会形成较长的链，不然也会触发重构</a:t>
+            </a:r>
+          </a:p>
+          <a:p>
+            <a:pPr algn="l" defTabSz="825500">
+              <a:defRPr sz="3600">
+                <a:solidFill>
+                  <a:srgbClr val="000000"/>
+                </a:solidFill>
+                <a:latin typeface="Monaco"/>
+                <a:ea typeface="Monaco"/>
+                <a:cs typeface="Monaco"/>
+                <a:sym typeface="Monaco"/>
+              </a:defRPr>
+            </a:pPr>
+            <a:r>
+              <a:t>9，所以一棵子树中，存活节点数量O(k)，死亡节点数量O(k)，节点总量O(k)</a:t>
+            </a:r>
+          </a:p>
+          <a:p>
+            <a:pPr algn="l" defTabSz="825500">
+              <a:defRPr sz="3600">
+                <a:solidFill>
+                  <a:srgbClr val="000000"/>
+                </a:solidFill>
+                <a:latin typeface="Monaco"/>
+                <a:ea typeface="Monaco"/>
+                <a:cs typeface="Monaco"/>
+                <a:sym typeface="Monaco"/>
+              </a:defRPr>
+            </a:pPr>
+            <a:r>
+              <a:t>10，所以一条从上到下的路径中，存活数量O(log k)，死亡数量O(log k)，节点总量O(log k)</a:t>
+            </a:r>
+          </a:p>
+          <a:p>
+            <a:pPr algn="l" defTabSz="825500">
+              <a:defRPr sz="3600">
+                <a:solidFill>
+                  <a:srgbClr val="000000"/>
+                </a:solidFill>
+                <a:latin typeface="Monaco"/>
+                <a:ea typeface="Monaco"/>
+                <a:cs typeface="Monaco"/>
+                <a:sym typeface="Monaco"/>
+              </a:defRPr>
+            </a:pPr>
+            <a:r>
+              <a:t>11，所以我设计的替罪羊树和经典替罪羊树，复杂度一致，单次均摊O(log n)</a:t>
+            </a:r>
+          </a:p>
+        </p:txBody>
+      </p:sp>
+    </p:spTree>
+  </p:cSld>
+  <p:clrMapOvr>
+    <a:masterClrMapping/>
+  </p:clrMapOvr>
+  <p:transition xmlns:p14="http://schemas.microsoft.com/office/powerpoint/2010/main" spd="med" advClick="1"/>
+</p:sld>
+</file>
+
+<file path=ppt/slides/slide8.xml><?xml version="1.0" encoding="utf-8"?>
+<p:sld xmlns:a="http://schemas.openxmlformats.org/drawingml/2006/main" xmlns:r="http://schemas.openxmlformats.org/officeDocument/2006/relationships" xmlns:p="http://schemas.openxmlformats.org/presentationml/2006/main" xmlns:m="http://schemas.openxmlformats.org/officeDocument/2006/math" xmlns:a14="http://schemas.microsoft.com/office/drawing/2010/main" showMasterSp="1" showMasterPhAnim="1">
+  <p:cSld>
+    <p:spTree>
+      <p:nvGrpSpPr>
+        <p:cNvPr id="1" name=""/>
+        <p:cNvGrpSpPr/>
+        <p:nvPr/>
+      </p:nvGrpSpPr>
+      <p:grpSpPr>
+        <a:xfrm>
+          <a:off x="0" y="0"/>
+          <a:ext cx="0" cy="0"/>
+          <a:chOff x="0" y="0"/>
+          <a:chExt cx="0" cy="0"/>
+        </a:xfrm>
+      </p:grpSpPr>
+      <p:sp>
+        <p:nvSpPr>
+          <p:cNvPr id="179" name="替罪羊树"/>
+          <p:cNvSpPr txBox="1"/>
+          <p:nvPr>
+            <p:ph type="ctrTitle"/>
+          </p:nvPr>
+        </p:nvSpPr>
+        <p:spPr>
+          <a:xfrm>
+            <a:off x="1206498" y="464303"/>
+            <a:ext cx="21971004" cy="2021991"/>
+          </a:xfrm>
+          <a:prstGeom prst="rect">
+            <a:avLst/>
+          </a:prstGeom>
+        </p:spPr>
+        <p:txBody>
+          <a:bodyPr/>
+          <a:lstStyle>
+            <a:lvl1pPr defTabSz="825500">
+              <a:lnSpc>
+                <a:spcPct val="100000"/>
+              </a:lnSpc>
+              <a:defRPr b="0" spc="0" sz="5500">
+                <a:latin typeface="Monaco"/>
+                <a:ea typeface="Monaco"/>
+                <a:cs typeface="Monaco"/>
+                <a:sym typeface="Monaco"/>
+              </a:defRPr>
+            </a:lvl1pPr>
+          </a:lstStyle>
+          <a:p>
+            <a:pPr/>
+            <a:r>
+              <a:t>替罪羊树</a:t>
+            </a:r>
+          </a:p>
+        </p:txBody>
+      </p:sp>
+      <p:sp>
+        <p:nvSpPr>
+          <p:cNvPr id="180" name="左程云"/>
+          <p:cNvSpPr txBox="1"/>
+          <p:nvPr/>
+        </p:nvSpPr>
+        <p:spPr>
+          <a:xfrm>
+            <a:off x="1206500" y="12631366"/>
+            <a:ext cx="21971001" cy="736601"/>
+          </a:xfrm>
+          <a:prstGeom prst="rect">
+            <a:avLst/>
+          </a:prstGeom>
+          <a:ln w="12700">
+            <a:miter lim="400000"/>
+          </a:ln>
+          <a:extLst>
+            <a:ext uri="{C572A759-6A51-4108-AA02-DFA0A04FC94B}">
+              <ma14:wrappingTextBoxFlag xmlns:ma14="http://schemas.microsoft.com/office/mac/drawingml/2011/main" val="1"/>
+            </a:ext>
+          </a:extLst>
+        </p:spPr>
+        <p:txBody>
+          <a:bodyPr lIns="50800" tIns="50800" rIns="50800" bIns="50800" anchor="ctr">
+            <a:spAutoFit/>
+          </a:bodyPr>
+          <a:lstStyle>
+            <a:lvl1pPr algn="r" defTabSz="825500">
+              <a:defRPr sz="3600">
+                <a:solidFill>
+                  <a:srgbClr val="000000"/>
+                </a:solidFill>
+                <a:latin typeface="Monaco"/>
+                <a:ea typeface="Monaco"/>
+                <a:cs typeface="Monaco"/>
+                <a:sym typeface="Monaco"/>
+              </a:defRPr>
+            </a:lvl1pPr>
+          </a:lstStyle>
+          <a:p>
+            <a:pPr/>
+            <a:r>
+              <a:t>左程云</a:t>
+            </a:r>
+          </a:p>
+        </p:txBody>
+      </p:sp>
+      <p:sp>
+        <p:nvSpPr>
+          <p:cNvPr id="181" name="不做词频压缩的替罪羊树的实现…"/>
+          <p:cNvSpPr txBox="1"/>
+          <p:nvPr/>
+        </p:nvSpPr>
+        <p:spPr>
+          <a:xfrm>
+            <a:off x="1206499" y="2978820"/>
+            <a:ext cx="21971002" cy="9365108"/>
+          </a:xfrm>
+          <a:prstGeom prst="rect">
+            <a:avLst/>
+          </a:prstGeom>
+          <a:ln w="12700">
+            <a:miter lim="400000"/>
+          </a:ln>
+          <a:extLst>
+            <a:ext uri="{C572A759-6A51-4108-AA02-DFA0A04FC94B}">
+              <ma14:wrappingTextBoxFlag xmlns:ma14="http://schemas.microsoft.com/office/mac/drawingml/2011/main" val="1"/>
+            </a:ext>
+          </a:extLst>
+        </p:spPr>
+        <p:txBody>
+          <a:bodyPr lIns="45719" rIns="45719">
+            <a:normAutofit fontScale="100000" lnSpcReduction="0"/>
+          </a:bodyPr>
+          <a:lstStyle/>
+          <a:p>
+            <a:pPr algn="l" defTabSz="825500">
+              <a:defRPr sz="3600">
+                <a:solidFill>
+                  <a:srgbClr val="000000"/>
+                </a:solidFill>
+                <a:latin typeface="Monaco"/>
+                <a:ea typeface="Monaco"/>
+                <a:cs typeface="Monaco"/>
+                <a:sym typeface="Monaco"/>
+              </a:defRPr>
+            </a:pPr>
+            <a:r>
+              <a:t>不做词频压缩的替罪羊树的实现</a:t>
+            </a:r>
+          </a:p>
+          <a:p>
+            <a:pPr algn="l" defTabSz="825500">
+              <a:defRPr sz="3600">
+                <a:solidFill>
+                  <a:srgbClr val="000000"/>
+                </a:solidFill>
+                <a:latin typeface="Monaco"/>
+                <a:ea typeface="Monaco"/>
+                <a:cs typeface="Monaco"/>
+                <a:sym typeface="Monaco"/>
+              </a:defRPr>
+            </a:pPr>
+          </a:p>
+          <a:p>
+            <a:pPr algn="l" defTabSz="825500">
+              <a:defRPr sz="3600">
+                <a:solidFill>
+                  <a:srgbClr val="000000"/>
+                </a:solidFill>
+                <a:latin typeface="Monaco"/>
+                <a:ea typeface="Monaco"/>
+                <a:cs typeface="Monaco"/>
+                <a:sym typeface="Monaco"/>
+              </a:defRPr>
+            </a:pPr>
+            <a:r>
+              <a:t>本节课代码中的better1文件，java代码实现</a:t>
+            </a:r>
+          </a:p>
+          <a:p>
+            <a:pPr algn="l" defTabSz="825500">
+              <a:defRPr sz="3600">
+                <a:solidFill>
+                  <a:srgbClr val="000000"/>
+                </a:solidFill>
+                <a:latin typeface="Monaco"/>
+                <a:ea typeface="Monaco"/>
+                <a:cs typeface="Monaco"/>
+                <a:sym typeface="Monaco"/>
+              </a:defRPr>
+            </a:pPr>
+          </a:p>
+          <a:p>
+            <a:pPr algn="l" defTabSz="825500">
+              <a:defRPr sz="3600">
+                <a:solidFill>
+                  <a:srgbClr val="000000"/>
+                </a:solidFill>
+                <a:latin typeface="Monaco"/>
+                <a:ea typeface="Monaco"/>
+                <a:cs typeface="Monaco"/>
+                <a:sym typeface="Monaco"/>
+              </a:defRPr>
+            </a:pPr>
+            <a:r>
+              <a:t>本节课代码中的better2文件，C++代码实现</a:t>
+            </a:r>
+          </a:p>
+          <a:p>
+            <a:pPr algn="l" defTabSz="825500">
+              <a:defRPr sz="3600">
+                <a:solidFill>
+                  <a:srgbClr val="000000"/>
+                </a:solidFill>
+                <a:latin typeface="Monaco"/>
+                <a:ea typeface="Monaco"/>
+                <a:cs typeface="Monaco"/>
+                <a:sym typeface="Monaco"/>
+              </a:defRPr>
+            </a:pPr>
+          </a:p>
+          <a:p>
+            <a:pPr algn="l" defTabSz="825500">
+              <a:defRPr sz="3600">
+                <a:solidFill>
+                  <a:schemeClr val="accent5">
+                    <a:hueOff val="-82419"/>
+                    <a:satOff val="-9513"/>
+                    <a:lumOff val="-16343"/>
+                  </a:schemeClr>
+                </a:solidFill>
+                <a:latin typeface="Monaco"/>
+                <a:ea typeface="Monaco"/>
+                <a:cs typeface="Monaco"/>
+                <a:sym typeface="Monaco"/>
+              </a:defRPr>
+            </a:pPr>
+            <a:r>
+              <a:t>课上重点讲解</a:t>
+            </a:r>
+          </a:p>
+        </p:txBody>
+      </p:sp>
+    </p:spTree>
+  </p:cSld>
+  <p:clrMapOvr>
+    <a:masterClrMapping/>
+  </p:clrMapOvr>
+  <p:transition xmlns:p14="http://schemas.microsoft.com/office/powerpoint/2010/main" spd="med" advClick="1"/>
+</p:sld>
+</file>
+
 <file path=ppt/theme/theme1.xml><?xml version="1.0" encoding="utf-8"?>
 <a:theme xmlns:a="http://schemas.openxmlformats.org/drawingml/2006/main" xmlns:r="http://schemas.openxmlformats.org/officeDocument/2006/relationships" name="21_BasicWhite">
   <a:themeElements>
